--- a/军民融合/ppt/图3 优化再优化.pptx
+++ b/军民融合/ppt/图3 优化再优化.pptx
@@ -3803,8 +3803,8 @@
         </p:nvSpPr>
         <p:spPr>
           <a:xfrm>
-            <a:off x="3035300" y="9142095"/>
-            <a:ext cx="3793490" cy="941705"/>
+            <a:off x="3658870" y="9142095"/>
+            <a:ext cx="3169920" cy="941705"/>
           </a:xfrm>
           <a:prstGeom prst="roundRect">
             <a:avLst>
@@ -3883,7 +3883,7 @@
         <p:spPr>
           <a:xfrm>
             <a:off x="753110" y="9142095"/>
-            <a:ext cx="2169795" cy="941705"/>
+            <a:ext cx="2709545" cy="941705"/>
           </a:xfrm>
           <a:prstGeom prst="roundRect">
             <a:avLst>
@@ -3953,6 +3953,43 @@
           </a:p>
         </p:txBody>
       </p:sp>
+      <p:pic>
+        <p:nvPicPr>
+          <p:cNvPr id="31" name="图片 30">
+            <a:extLst>
+              <a:ext uri="{FF2B5EF4-FFF2-40B4-BE49-F238E27FC236}">
+                <a16:creationId xmlns:a16="http://schemas.microsoft.com/office/drawing/2014/main" id="{CB1A5D0F-92B7-3FD3-675E-2B999F7310CC}"/>
+              </a:ext>
+            </a:extLst>
+          </p:cNvPr>
+          <p:cNvPicPr>
+            <a:picLocks noChangeAspect="1"/>
+          </p:cNvPicPr>
+          <p:nvPr/>
+        </p:nvPicPr>
+        <p:blipFill>
+          <a:blip r:embed="rId4" cstate="print">
+            <a:extLst>
+              <a:ext uri="{28A0092B-C50C-407E-A947-70E740481C1C}">
+                <a14:useLocalDpi xmlns:a14="http://schemas.microsoft.com/office/drawing/2010/main" val="0"/>
+              </a:ext>
+            </a:extLst>
+          </a:blip>
+          <a:srcRect l="10137" t="21555" r="10502" b="24414"/>
+          <a:stretch>
+            <a:fillRect/>
+          </a:stretch>
+        </p:blipFill>
+        <p:spPr>
+          <a:xfrm>
+            <a:off x="1003252" y="9310688"/>
+            <a:ext cx="620717" cy="422592"/>
+          </a:xfrm>
+          <a:prstGeom prst="rect">
+            <a:avLst/>
+          </a:prstGeom>
+        </p:spPr>
+      </p:pic>
       <p:sp>
         <p:nvSpPr>
           <p:cNvPr id="29" name="文本框 28"/>
@@ -3961,7 +3998,7 @@
         </p:nvSpPr>
         <p:spPr>
           <a:xfrm>
-            <a:off x="1098868" y="9701461"/>
+            <a:off x="1737492" y="9701461"/>
             <a:ext cx="642942" cy="276999"/>
           </a:xfrm>
           <a:prstGeom prst="rect">
@@ -4019,7 +4056,7 @@
         </p:nvSpPr>
         <p:spPr>
           <a:xfrm>
-            <a:off x="1776735" y="9701461"/>
+            <a:off x="2342789" y="9701461"/>
             <a:ext cx="1099815" cy="276999"/>
           </a:xfrm>
           <a:prstGeom prst="rect">
@@ -4078,24 +4115,59 @@
       </p:sp>
       <p:sp>
         <p:nvSpPr>
-          <p:cNvPr id="36" name="文本框 35"/>
-          <p:cNvSpPr txBox="1"/>
+          <p:cNvPr id="59" name="箭头: 燕尾形 1202">
+            <a:extLst>
+              <a:ext uri="{FF2B5EF4-FFF2-40B4-BE49-F238E27FC236}">
+                <a16:creationId xmlns:a16="http://schemas.microsoft.com/office/drawing/2014/main" id="{43BC096D-847E-C293-8363-5952480B23D2}"/>
+              </a:ext>
+            </a:extLst>
+          </p:cNvPr>
+          <p:cNvSpPr/>
           <p:nvPr/>
         </p:nvSpPr>
         <p:spPr>
-          <a:xfrm>
-            <a:off x="3770630" y="9702165"/>
-            <a:ext cx="665480" cy="275590"/>
-          </a:xfrm>
-          <a:prstGeom prst="rect">
+          <a:xfrm rot="10800000" flipH="1">
+            <a:off x="1404167" y="9364604"/>
+            <a:ext cx="1185320" cy="375264"/>
+          </a:xfrm>
+          <a:prstGeom prst="notchedRightArrow">
             <a:avLst/>
           </a:prstGeom>
-          <a:noFill/>
-        </p:spPr>
-        <p:txBody>
-          <a:bodyPr wrap="square" rtlCol="0">
-            <a:spAutoFit/>
-          </a:bodyPr>
+          <a:gradFill>
+            <a:gsLst>
+              <a:gs pos="100000">
+                <a:srgbClr val="C00000"/>
+              </a:gs>
+              <a:gs pos="5000">
+                <a:srgbClr val="C00000">
+                  <a:alpha val="0"/>
+                </a:srgbClr>
+              </a:gs>
+            </a:gsLst>
+            <a:lin ang="0" scaled="0"/>
+          </a:gradFill>
+          <a:ln>
+            <a:noFill/>
+          </a:ln>
+        </p:spPr>
+        <p:style>
+          <a:lnRef idx="2">
+            <a:schemeClr val="accent1">
+              <a:shade val="15000"/>
+            </a:schemeClr>
+          </a:lnRef>
+          <a:fillRef idx="1">
+            <a:schemeClr val="accent1"/>
+          </a:fillRef>
+          <a:effectRef idx="0">
+            <a:schemeClr val="accent1"/>
+          </a:effectRef>
+          <a:fontRef idx="minor">
+            <a:schemeClr val="lt1"/>
+          </a:fontRef>
+        </p:style>
+        <p:txBody>
+          <a:bodyPr rtlCol="0" anchor="ctr"/>
           <a:lstStyle/>
           <a:p>
             <a:pPr marL="0" marR="0" lvl="0" indent="0" algn="ctr" defTabSz="914400" rtl="0" eaLnBrk="1" fontAlgn="auto" latinLnBrk="0" hangingPunct="1">
@@ -4114,36 +4186,33 @@
               <a:buNone/>
               <a:defRPr/>
             </a:pPr>
-            <a:r>
-              <a:rPr kumimoji="0" lang="zh-CN" altLang="en-US" sz="1200" b="1" i="0" u="none" strike="noStrike" kern="1200" cap="none" spc="0" normalizeH="0" baseline="0" noProof="0" dirty="0">
-                <a:ln>
-                  <a:noFill/>
-                </a:ln>
-                <a:solidFill>
-                  <a:prstClr val="black"/>
-                </a:solidFill>
-                <a:effectLst/>
-                <a:uLnTx/>
-                <a:uFillTx/>
-                <a:latin typeface="微软雅黑" panose="020B0503020204020204" charset="-122"/>
-                <a:ea typeface="微软雅黑" panose="020B0503020204020204" charset="-122"/>
-                <a:cs typeface="+mn-cs"/>
-              </a:rPr>
-              <a:t>算力</a:t>
-            </a:r>
-          </a:p>
-        </p:txBody>
-      </p:sp>
-      <p:sp>
-        <p:nvSpPr>
-          <p:cNvPr id="37" name="文本框 36"/>
+            <a:endParaRPr kumimoji="0" lang="zh-CN" altLang="en-US" sz="2235" b="0" i="0" u="none" strike="noStrike" kern="1200" cap="none" spc="0" normalizeH="0" baseline="0" noProof="0">
+              <a:ln>
+                <a:noFill/>
+              </a:ln>
+              <a:solidFill>
+                <a:prstClr val="white"/>
+              </a:solidFill>
+              <a:effectLst/>
+              <a:uLnTx/>
+              <a:uFillTx/>
+              <a:latin typeface="等线" panose="02010600030101010101" charset="-122"/>
+              <a:ea typeface="等线" panose="02010600030101010101" charset="-122"/>
+              <a:cs typeface="+mn-cs"/>
+            </a:endParaRPr>
+          </a:p>
+        </p:txBody>
+      </p:sp>
+      <p:sp>
+        <p:nvSpPr>
+          <p:cNvPr id="36" name="文本框 35"/>
           <p:cNvSpPr txBox="1"/>
           <p:nvPr/>
         </p:nvSpPr>
         <p:spPr>
           <a:xfrm>
-            <a:off x="4309110" y="9702165"/>
-            <a:ext cx="806450" cy="275590"/>
+            <a:off x="3770630" y="9702165"/>
+            <a:ext cx="665480" cy="275590"/>
           </a:xfrm>
           <a:prstGeom prst="rect">
             <a:avLst/>
@@ -4187,21 +4256,21 @@
                 <a:ea typeface="微软雅黑" panose="020B0503020204020204" charset="-122"/>
                 <a:cs typeface="+mn-cs"/>
               </a:rPr>
-              <a:t>网络</a:t>
-            </a:r>
-          </a:p>
-        </p:txBody>
-      </p:sp>
-      <p:sp>
-        <p:nvSpPr>
-          <p:cNvPr id="38" name="文本框 37"/>
+              <a:t>算力</a:t>
+            </a:r>
+          </a:p>
+        </p:txBody>
+      </p:sp>
+      <p:sp>
+        <p:nvSpPr>
+          <p:cNvPr id="37" name="文本框 36"/>
           <p:cNvSpPr txBox="1"/>
           <p:nvPr/>
         </p:nvSpPr>
         <p:spPr>
           <a:xfrm>
-            <a:off x="4906010" y="9702165"/>
-            <a:ext cx="760730" cy="275590"/>
+            <a:off x="4309110" y="9702165"/>
+            <a:ext cx="806450" cy="275590"/>
           </a:xfrm>
           <a:prstGeom prst="rect">
             <a:avLst/>
@@ -4245,21 +4314,21 @@
                 <a:ea typeface="微软雅黑" panose="020B0503020204020204" charset="-122"/>
                 <a:cs typeface="+mn-cs"/>
               </a:rPr>
-              <a:t>平台</a:t>
-            </a:r>
-          </a:p>
-        </p:txBody>
-      </p:sp>
-      <p:sp>
-        <p:nvSpPr>
-          <p:cNvPr id="39" name="文本框 38"/>
+              <a:t>网络</a:t>
+            </a:r>
+          </a:p>
+        </p:txBody>
+      </p:sp>
+      <p:sp>
+        <p:nvSpPr>
+          <p:cNvPr id="38" name="文本框 37"/>
           <p:cNvSpPr txBox="1"/>
           <p:nvPr/>
         </p:nvSpPr>
         <p:spPr>
           <a:xfrm>
-            <a:off x="5634990" y="9702165"/>
-            <a:ext cx="532130" cy="275590"/>
+            <a:off x="4906010" y="9702165"/>
+            <a:ext cx="760730" cy="275590"/>
           </a:xfrm>
           <a:prstGeom prst="rect">
             <a:avLst/>
@@ -4303,21 +4372,21 @@
                 <a:ea typeface="微软雅黑" panose="020B0503020204020204" charset="-122"/>
                 <a:cs typeface="+mn-cs"/>
               </a:rPr>
-              <a:t>模型</a:t>
-            </a:r>
-          </a:p>
-        </p:txBody>
-      </p:sp>
-      <p:sp>
-        <p:nvSpPr>
-          <p:cNvPr id="40" name="文本框 39"/>
+              <a:t>平台</a:t>
+            </a:r>
+          </a:p>
+        </p:txBody>
+      </p:sp>
+      <p:sp>
+        <p:nvSpPr>
+          <p:cNvPr id="39" name="文本框 38"/>
           <p:cNvSpPr txBox="1"/>
           <p:nvPr/>
         </p:nvSpPr>
         <p:spPr>
           <a:xfrm>
-            <a:off x="6046470" y="9702165"/>
-            <a:ext cx="822960" cy="275590"/>
+            <a:off x="5634990" y="9702165"/>
+            <a:ext cx="532130" cy="275590"/>
           </a:xfrm>
           <a:prstGeom prst="rect">
             <a:avLst/>
@@ -4361,6 +4430,64 @@
                 <a:ea typeface="微软雅黑" panose="020B0503020204020204" charset="-122"/>
                 <a:cs typeface="+mn-cs"/>
               </a:rPr>
+              <a:t>模型</a:t>
+            </a:r>
+          </a:p>
+        </p:txBody>
+      </p:sp>
+      <p:sp>
+        <p:nvSpPr>
+          <p:cNvPr id="40" name="文本框 39"/>
+          <p:cNvSpPr txBox="1"/>
+          <p:nvPr/>
+        </p:nvSpPr>
+        <p:spPr>
+          <a:xfrm>
+            <a:off x="6046470" y="9702165"/>
+            <a:ext cx="822960" cy="275590"/>
+          </a:xfrm>
+          <a:prstGeom prst="rect">
+            <a:avLst/>
+          </a:prstGeom>
+          <a:noFill/>
+        </p:spPr>
+        <p:txBody>
+          <a:bodyPr wrap="square" rtlCol="0">
+            <a:spAutoFit/>
+          </a:bodyPr>
+          <a:lstStyle/>
+          <a:p>
+            <a:pPr marL="0" marR="0" lvl="0" indent="0" algn="ctr" defTabSz="914400" rtl="0" eaLnBrk="1" fontAlgn="auto" latinLnBrk="0" hangingPunct="1">
+              <a:lnSpc>
+                <a:spcPct val="100000"/>
+              </a:lnSpc>
+              <a:spcBef>
+                <a:spcPts val="0"/>
+              </a:spcBef>
+              <a:spcAft>
+                <a:spcPts val="0"/>
+              </a:spcAft>
+              <a:buClrTx/>
+              <a:buSzTx/>
+              <a:buFontTx/>
+              <a:buNone/>
+              <a:defRPr/>
+            </a:pPr>
+            <a:r>
+              <a:rPr kumimoji="0" lang="zh-CN" altLang="en-US" sz="1200" b="1" i="0" u="none" strike="noStrike" kern="1200" cap="none" spc="0" normalizeH="0" baseline="0" noProof="0" dirty="0">
+                <a:ln>
+                  <a:noFill/>
+                </a:ln>
+                <a:solidFill>
+                  <a:prstClr val="black"/>
+                </a:solidFill>
+                <a:effectLst/>
+                <a:uLnTx/>
+                <a:uFillTx/>
+                <a:latin typeface="微软雅黑" panose="020B0503020204020204" charset="-122"/>
+                <a:ea typeface="微软雅黑" panose="020B0503020204020204" charset="-122"/>
+                <a:cs typeface="+mn-cs"/>
+              </a:rPr>
               <a:t>存储</a:t>
             </a:r>
           </a:p>
@@ -4369,47 +4496,6 @@
       <p:pic>
         <p:nvPicPr>
           <p:cNvPr id="42" name="Picture 8" descr="Cpu"/>
-          <p:cNvPicPr>
-            <a:picLocks noChangeAspect="1" noChangeArrowheads="1"/>
-          </p:cNvPicPr>
-          <p:nvPr/>
-        </p:nvPicPr>
-        <p:blipFill>
-          <a:blip r:embed="rId4" cstate="print">
-            <a:extLst>
-              <a:ext uri="{28A0092B-C50C-407E-A947-70E740481C1C}">
-                <a14:useLocalDpi xmlns:a14="http://schemas.microsoft.com/office/drawing/2010/main" val="0"/>
-              </a:ext>
-            </a:extLst>
-          </a:blip>
-          <a:srcRect/>
-          <a:stretch>
-            <a:fillRect/>
-          </a:stretch>
-        </p:blipFill>
-        <p:spPr bwMode="auto">
-          <a:xfrm>
-            <a:off x="5089525" y="9286875"/>
-            <a:ext cx="439420" cy="468630"/>
-          </a:xfrm>
-          <a:prstGeom prst="rect">
-            <a:avLst/>
-          </a:prstGeom>
-          <a:noFill/>
-          <a:extLst>
-            <a:ext uri="{909E8E84-426E-40DD-AFC4-6F175D3DCCD1}">
-              <a14:hiddenFill xmlns:a14="http://schemas.microsoft.com/office/drawing/2010/main">
-                <a:solidFill>
-                  <a:srgbClr val="FFFFFF"/>
-                </a:solidFill>
-              </a14:hiddenFill>
-            </a:ext>
-          </a:extLst>
-        </p:spPr>
-      </p:pic>
-      <p:pic>
-        <p:nvPicPr>
-          <p:cNvPr id="43" name="Picture 10" descr="Gpu "/>
           <p:cNvPicPr>
             <a:picLocks noChangeAspect="1" noChangeArrowheads="1"/>
           </p:cNvPicPr>
@@ -4430,8 +4516,8 @@
         </p:blipFill>
         <p:spPr bwMode="auto">
           <a:xfrm>
-            <a:off x="3879850" y="9279890"/>
-            <a:ext cx="446405" cy="476250"/>
+            <a:off x="5089525" y="9286875"/>
+            <a:ext cx="439420" cy="468630"/>
           </a:xfrm>
           <a:prstGeom prst="rect">
             <a:avLst/>
@@ -4450,7 +4536,7 @@
       </p:pic>
       <p:pic>
         <p:nvPicPr>
-          <p:cNvPr id="47" name="Picture 12" descr="Bandwidth "/>
+          <p:cNvPr id="43" name="Picture 10" descr="Gpu "/>
           <p:cNvPicPr>
             <a:picLocks noChangeAspect="1" noChangeArrowheads="1"/>
           </p:cNvPicPr>
@@ -4471,8 +4557,8 @@
         </p:blipFill>
         <p:spPr bwMode="auto">
           <a:xfrm>
-            <a:off x="4513580" y="9300845"/>
-            <a:ext cx="405130" cy="432435"/>
+            <a:off x="3879850" y="9279890"/>
+            <a:ext cx="446405" cy="476250"/>
           </a:xfrm>
           <a:prstGeom prst="rect">
             <a:avLst/>
@@ -4491,31 +4577,48 @@
       </p:pic>
       <p:pic>
         <p:nvPicPr>
-          <p:cNvPr id="49" name="图片 48" descr="ai-cloud"/>
+          <p:cNvPr id="47" name="Picture 12" descr="Bandwidth "/>
           <p:cNvPicPr>
-            <a:picLocks noChangeAspect="1"/>
+            <a:picLocks noChangeAspect="1" noChangeArrowheads="1"/>
           </p:cNvPicPr>
           <p:nvPr/>
         </p:nvPicPr>
         <p:blipFill>
-          <a:blip r:embed="rId7"/>
+          <a:blip r:embed="rId7" cstate="print">
+            <a:extLst>
+              <a:ext uri="{28A0092B-C50C-407E-A947-70E740481C1C}">
+                <a14:useLocalDpi xmlns:a14="http://schemas.microsoft.com/office/drawing/2010/main" val="0"/>
+              </a:ext>
+            </a:extLst>
+          </a:blip>
+          <a:srcRect/>
           <a:stretch>
             <a:fillRect/>
           </a:stretch>
         </p:blipFill>
-        <p:spPr>
-          <a:xfrm>
-            <a:off x="5685155" y="9302750"/>
-            <a:ext cx="424815" cy="453390"/>
+        <p:spPr bwMode="auto">
+          <a:xfrm>
+            <a:off x="4513580" y="9300845"/>
+            <a:ext cx="405130" cy="432435"/>
           </a:xfrm>
           <a:prstGeom prst="rect">
             <a:avLst/>
           </a:prstGeom>
+          <a:noFill/>
+          <a:extLst>
+            <a:ext uri="{909E8E84-426E-40DD-AFC4-6F175D3DCCD1}">
+              <a14:hiddenFill xmlns:a14="http://schemas.microsoft.com/office/drawing/2010/main">
+                <a:solidFill>
+                  <a:srgbClr val="FFFFFF"/>
+                </a:solidFill>
+              </a14:hiddenFill>
+            </a:ext>
+          </a:extLst>
         </p:spPr>
       </p:pic>
       <p:pic>
         <p:nvPicPr>
-          <p:cNvPr id="50" name="图片 49" descr="disk"/>
+          <p:cNvPr id="49" name="图片 48" descr="ai-cloud"/>
           <p:cNvPicPr>
             <a:picLocks noChangeAspect="1"/>
           </p:cNvPicPr>
@@ -4529,8 +4632,8 @@
         </p:blipFill>
         <p:spPr>
           <a:xfrm>
-            <a:off x="6250940" y="9349740"/>
-            <a:ext cx="359410" cy="383540"/>
+            <a:off x="5685155" y="9302750"/>
+            <a:ext cx="424815" cy="453390"/>
           </a:xfrm>
           <a:prstGeom prst="rect">
             <a:avLst/>
@@ -4539,7 +4642,7 @@
       </p:pic>
       <p:pic>
         <p:nvPicPr>
-          <p:cNvPr id="51" name="图片 50"/>
+          <p:cNvPr id="50" name="图片 49" descr="disk"/>
           <p:cNvPicPr>
             <a:picLocks noChangeAspect="1"/>
           </p:cNvPicPr>
@@ -4553,24 +4656,48 @@
         </p:blipFill>
         <p:spPr>
           <a:xfrm>
-            <a:off x="3266440" y="9302750"/>
-            <a:ext cx="403225" cy="430530"/>
+            <a:off x="6250940" y="9349740"/>
+            <a:ext cx="359410" cy="383540"/>
           </a:xfrm>
           <a:prstGeom prst="rect">
             <a:avLst/>
           </a:prstGeom>
         </p:spPr>
       </p:pic>
-      <p:sp>
-        <p:nvSpPr>
-          <p:cNvPr id="52" name="文本框 51"/>
+      <p:pic>
+        <p:nvPicPr>
+          <p:cNvPr id="54" name="图片 53" descr="networking"/>
+          <p:cNvPicPr>
+            <a:picLocks noChangeAspect="1"/>
+          </p:cNvPicPr>
+          <p:nvPr/>
+        </p:nvPicPr>
+        <p:blipFill>
+          <a:blip r:embed="rId10"/>
+          <a:stretch>
+            <a:fillRect/>
+          </a:stretch>
+        </p:blipFill>
+        <p:spPr>
+          <a:xfrm>
+            <a:off x="2687594" y="9300845"/>
+            <a:ext cx="405130" cy="432435"/>
+          </a:xfrm>
+          <a:prstGeom prst="rect">
+            <a:avLst/>
+          </a:prstGeom>
+        </p:spPr>
+      </p:pic>
+      <p:sp>
+        <p:nvSpPr>
+          <p:cNvPr id="55" name="文本框 54"/>
           <p:cNvSpPr txBox="1"/>
           <p:nvPr/>
         </p:nvSpPr>
         <p:spPr>
           <a:xfrm>
-            <a:off x="3094990" y="9702165"/>
-            <a:ext cx="758190" cy="275590"/>
+            <a:off x="1195705" y="8791892"/>
+            <a:ext cx="1737360" cy="320040"/>
           </a:xfrm>
           <a:prstGeom prst="rect">
             <a:avLst/>
@@ -4600,128 +4727,29 @@
               <a:defRPr/>
             </a:pPr>
             <a:r>
-              <a:rPr kumimoji="0" lang="zh-CN" altLang="en-US" sz="1200" b="1" i="0" u="none" strike="noStrike" kern="1200" cap="none" spc="0" normalizeH="0" baseline="0" noProof="0" dirty="0">
-                <a:ln>
-                  <a:noFill/>
-                </a:ln>
-                <a:solidFill>
-                  <a:prstClr val="black"/>
-                </a:solidFill>
-                <a:effectLst/>
-                <a:uLnTx/>
-                <a:uFillTx/>
+              <a:rPr lang="zh-CN" altLang="en-US" sz="1490" b="1" dirty="0">
+                <a:solidFill>
+                  <a:srgbClr val="C00000"/>
+                </a:solidFill>
                 <a:latin typeface="微软雅黑" panose="020B0503020204020204" charset="-122"/>
                 <a:ea typeface="微软雅黑" panose="020B0503020204020204" charset="-122"/>
-                <a:cs typeface="+mn-cs"/>
-              </a:rPr>
-              <a:t>传感器</a:t>
-            </a:r>
-          </a:p>
-        </p:txBody>
-      </p:sp>
-      <p:pic>
-        <p:nvPicPr>
-          <p:cNvPr id="53" name="图片 52" descr="server (1)"/>
-          <p:cNvPicPr>
-            <a:picLocks noChangeAspect="1"/>
-          </p:cNvPicPr>
-          <p:nvPr/>
-        </p:nvPicPr>
-        <p:blipFill>
-          <a:blip r:embed="rId10"/>
-          <a:stretch>
-            <a:fillRect/>
-          </a:stretch>
-        </p:blipFill>
-        <p:spPr>
-          <a:xfrm>
-            <a:off x="1177930" y="9265920"/>
-            <a:ext cx="488950" cy="521970"/>
-          </a:xfrm>
-          <a:prstGeom prst="rect">
-            <a:avLst/>
-          </a:prstGeom>
-        </p:spPr>
-      </p:pic>
-      <p:pic>
-        <p:nvPicPr>
-          <p:cNvPr id="54" name="图片 53" descr="networking"/>
-          <p:cNvPicPr>
-            <a:picLocks noChangeAspect="1"/>
-          </p:cNvPicPr>
-          <p:nvPr/>
-        </p:nvPicPr>
-        <p:blipFill>
-          <a:blip r:embed="rId11"/>
-          <a:stretch>
-            <a:fillRect/>
-          </a:stretch>
-        </p:blipFill>
-        <p:spPr>
-          <a:xfrm>
-            <a:off x="2121540" y="9300845"/>
-            <a:ext cx="405130" cy="432435"/>
-          </a:xfrm>
-          <a:prstGeom prst="rect">
-            <a:avLst/>
-          </a:prstGeom>
-        </p:spPr>
-      </p:pic>
-      <p:sp>
-        <p:nvSpPr>
-          <p:cNvPr id="55" name="文本框 54"/>
-          <p:cNvSpPr txBox="1"/>
-          <p:nvPr/>
-        </p:nvSpPr>
-        <p:spPr>
-          <a:xfrm>
-            <a:off x="2911475" y="10073640"/>
-            <a:ext cx="1737360" cy="320040"/>
-          </a:xfrm>
-          <a:prstGeom prst="rect">
-            <a:avLst/>
-          </a:prstGeom>
-          <a:noFill/>
-        </p:spPr>
-        <p:txBody>
-          <a:bodyPr wrap="square" rtlCol="0">
-            <a:spAutoFit/>
-          </a:bodyPr>
-          <a:lstStyle/>
-          <a:p>
-            <a:pPr marL="0" marR="0" lvl="0" indent="0" algn="ctr" defTabSz="914400" rtl="0" eaLnBrk="1" fontAlgn="auto" latinLnBrk="0" hangingPunct="1">
-              <a:lnSpc>
-                <a:spcPct val="100000"/>
-              </a:lnSpc>
-              <a:spcBef>
-                <a:spcPts val="0"/>
-              </a:spcBef>
-              <a:spcAft>
-                <a:spcPts val="0"/>
-              </a:spcAft>
-              <a:buClrTx/>
-              <a:buSzTx/>
-              <a:buFontTx/>
-              <a:buNone/>
-              <a:defRPr/>
-            </a:pPr>
-            <a:r>
-              <a:rPr kumimoji="0" lang="zh-CN" altLang="en-US" sz="1490" b="1" i="0" u="none" strike="noStrike" kern="1200" cap="none" spc="0" normalizeH="0" baseline="0" noProof="0" dirty="0">
-                <a:ln>
-                  <a:noFill/>
-                </a:ln>
-                <a:solidFill>
-                  <a:srgbClr val="C00000"/>
-                </a:solidFill>
-                <a:effectLst/>
-                <a:uLnTx/>
-                <a:uFillTx/>
-                <a:latin typeface="微软雅黑" panose="020B0503020204020204" charset="-122"/>
-                <a:ea typeface="微软雅黑" panose="020B0503020204020204" charset="-122"/>
-                <a:cs typeface="+mn-cs"/>
-              </a:rPr>
-              <a:t>技术架构支撑</a:t>
-            </a:r>
+              </a:rPr>
+              <a:t>信号采集平台</a:t>
+            </a:r>
+            <a:endParaRPr kumimoji="0" lang="zh-CN" altLang="en-US" sz="1490" b="1" i="0" u="none" strike="noStrike" kern="1200" cap="none" spc="0" normalizeH="0" baseline="0" noProof="0" dirty="0">
+              <a:ln>
+                <a:noFill/>
+              </a:ln>
+              <a:solidFill>
+                <a:srgbClr val="C00000"/>
+              </a:solidFill>
+              <a:effectLst/>
+              <a:uLnTx/>
+              <a:uFillTx/>
+              <a:latin typeface="微软雅黑" panose="020B0503020204020204" charset="-122"/>
+              <a:ea typeface="微软雅黑" panose="020B0503020204020204" charset="-122"/>
+              <a:cs typeface="+mn-cs"/>
+            </a:endParaRPr>
           </a:p>
         </p:txBody>
       </p:sp>
@@ -4733,7 +4761,7 @@
         </p:nvSpPr>
         <p:spPr>
           <a:xfrm>
-            <a:off x="2921000" y="8788400"/>
+            <a:off x="4474021" y="8790330"/>
             <a:ext cx="1717675" cy="323165"/>
           </a:xfrm>
           <a:prstGeom prst="rect">
@@ -5037,7 +5065,7 @@
           <p:nvPr/>
         </p:nvPicPr>
         <p:blipFill>
-          <a:blip r:embed="rId12" cstate="print">
+          <a:blip r:embed="rId11" cstate="print">
             <a:extLst>
               <a:ext uri="{28A0092B-C50C-407E-A947-70E740481C1C}">
                 <a14:useLocalDpi xmlns:a14="http://schemas.microsoft.com/office/drawing/2010/main" val="0"/>
@@ -6477,7 +6505,7 @@
           <p:nvPr/>
         </p:nvPicPr>
         <p:blipFill>
-          <a:blip r:embed="rId13" cstate="print">
+          <a:blip r:embed="rId12" cstate="print">
             <a:extLst>
               <a:ext uri="{28A0092B-C50C-407E-A947-70E740481C1C}">
                 <a14:useLocalDpi xmlns:a14="http://schemas.microsoft.com/office/drawing/2010/main" val="0"/>
@@ -8677,7 +8705,7 @@
           <p:nvPr/>
         </p:nvPicPr>
         <p:blipFill>
-          <a:blip r:embed="rId14" cstate="print">
+          <a:blip r:embed="rId13" cstate="print">
             <a:extLst>
               <a:ext uri="{28A0092B-C50C-407E-A947-70E740481C1C}">
                 <a14:useLocalDpi xmlns:a14="http://schemas.microsoft.com/office/drawing/2010/main" val="0"/>
@@ -9910,7 +9938,7 @@
           <p:nvPr/>
         </p:nvPicPr>
         <p:blipFill>
-          <a:blip r:embed="rId15"/>
+          <a:blip r:embed="rId14"/>
           <a:stretch>
             <a:fillRect/>
           </a:stretch>
@@ -9925,6 +9953,176 @@
           </a:prstGeom>
         </p:spPr>
       </p:pic>
+      <p:pic>
+        <p:nvPicPr>
+          <p:cNvPr id="6" name="图片 5">
+            <a:extLst>
+              <a:ext uri="{FF2B5EF4-FFF2-40B4-BE49-F238E27FC236}">
+                <a16:creationId xmlns:a16="http://schemas.microsoft.com/office/drawing/2014/main" id="{ACDDE059-DEF5-0862-244B-CBB8C1A35ABD}"/>
+              </a:ext>
+            </a:extLst>
+          </p:cNvPr>
+          <p:cNvPicPr>
+            <a:picLocks noChangeAspect="1"/>
+          </p:cNvPicPr>
+          <p:nvPr/>
+        </p:nvPicPr>
+        <p:blipFill>
+          <a:blip r:embed="rId15" cstate="print">
+            <a:extLst>
+              <a:ext uri="{BEBA8EAE-BF5A-486C-A8C5-ECC9F3942E4B}">
+                <a14:imgProps xmlns:a14="http://schemas.microsoft.com/office/drawing/2010/main">
+                  <a14:imgLayer r:embed="rId16">
+                    <a14:imgEffect>
+                      <a14:backgroundRemoval t="13433" b="82090" l="14179" r="85821">
+                        <a14:foregroundMark x1="17910" y1="48507" x2="25373" y2="64925"/>
+                        <a14:foregroundMark x1="29851" y1="51493" x2="31343" y2="75373"/>
+                        <a14:foregroundMark x1="86567" y1="64179" x2="44776" y2="82090"/>
+                        <a14:foregroundMark x1="79104" y1="66418" x2="77726" y2="60215"/>
+                        <a14:foregroundMark x1="50676" y1="69370" x2="50000" y2="75373"/>
+                        <a14:foregroundMark x1="55970" y1="22388" x2="51274" y2="64062"/>
+                        <a14:foregroundMark x1="72248" y1="60802" x2="76119" y2="71642"/>
+                        <a14:foregroundMark x1="64925" y1="40299" x2="65478" y2="41847"/>
+                        <a14:foregroundMark x1="83582" y1="46302" x2="83582" y2="46941"/>
+                        <a14:foregroundMark x1="53731" y1="17164" x2="71091" y2="32407"/>
+                        <a14:foregroundMark x1="78358" y1="60447" x2="67910" y2="81343"/>
+                        <a14:foregroundMark x1="85075" y1="47015" x2="85040" y2="47086"/>
+                        <a14:foregroundMark x1="56716" y1="14179" x2="72704" y2="29696"/>
+                        <a14:foregroundMark x1="61940" y1="17164" x2="75043" y2="25763"/>
+                        <a14:foregroundMark x1="86542" y1="42515" x2="86567" y2="42537"/>
+                        <a14:foregroundMark x1="57463" y1="17910" x2="72265" y2="30435"/>
+                        <a14:foregroundMark x1="31343" y1="26866" x2="21642" y2="64925"/>
+                        <a14:foregroundMark x1="20896" y1="37313" x2="14179" y2="68657"/>
+                        <a14:backgroundMark x1="63433" y1="48507" x2="78358" y2="52985"/>
+                        <a14:backgroundMark x1="82090" y1="50746" x2="78358" y2="60448"/>
+                        <a14:backgroundMark x1="84328" y1="47015" x2="83582" y2="54478"/>
+                        <a14:backgroundMark x1="64179" y1="44030" x2="70896" y2="43284"/>
+                      </a14:backgroundRemoval>
+                    </a14:imgEffect>
+                  </a14:imgLayer>
+                </a14:imgProps>
+              </a:ext>
+              <a:ext uri="{28A0092B-C50C-407E-A947-70E740481C1C}">
+                <a14:useLocalDpi xmlns:a14="http://schemas.microsoft.com/office/drawing/2010/main" val="0"/>
+              </a:ext>
+            </a:extLst>
+          </a:blip>
+          <a:srcRect l="9204" t="12644" r="8562" b="12458"/>
+          <a:stretch>
+            <a:fillRect/>
+          </a:stretch>
+        </p:blipFill>
+        <p:spPr>
+          <a:xfrm>
+            <a:off x="1832821" y="9316641"/>
+            <a:ext cx="457443" cy="416639"/>
+          </a:xfrm>
+          <a:prstGeom prst="rect">
+            <a:avLst/>
+          </a:prstGeom>
+        </p:spPr>
+      </p:pic>
+      <p:pic>
+        <p:nvPicPr>
+          <p:cNvPr id="13" name="图片 12">
+            <a:extLst>
+              <a:ext uri="{FF2B5EF4-FFF2-40B4-BE49-F238E27FC236}">
+                <a16:creationId xmlns:a16="http://schemas.microsoft.com/office/drawing/2014/main" id="{88C79060-54E2-D83C-29D6-B1FA055A9009}"/>
+              </a:ext>
+            </a:extLst>
+          </p:cNvPr>
+          <p:cNvPicPr>
+            <a:picLocks noChangeAspect="1"/>
+          </p:cNvPicPr>
+          <p:nvPr/>
+        </p:nvPicPr>
+        <p:blipFill>
+          <a:blip r:embed="rId17" cstate="print">
+            <a:extLst>
+              <a:ext uri="{28A0092B-C50C-407E-A947-70E740481C1C}">
+                <a14:useLocalDpi xmlns:a14="http://schemas.microsoft.com/office/drawing/2010/main" val="0"/>
+              </a:ext>
+            </a:extLst>
+          </a:blip>
+          <a:srcRect t="-1" b="5845"/>
+          <a:stretch>
+            <a:fillRect/>
+          </a:stretch>
+        </p:blipFill>
+        <p:spPr>
+          <a:xfrm>
+            <a:off x="2629650" y="9273463"/>
+            <a:ext cx="511964" cy="482042"/>
+          </a:xfrm>
+          <a:prstGeom prst="rect">
+            <a:avLst/>
+          </a:prstGeom>
+        </p:spPr>
+      </p:pic>
+      <p:sp>
+        <p:nvSpPr>
+          <p:cNvPr id="41" name="文本框 40">
+            <a:extLst>
+              <a:ext uri="{FF2B5EF4-FFF2-40B4-BE49-F238E27FC236}">
+                <a16:creationId xmlns:a16="http://schemas.microsoft.com/office/drawing/2014/main" id="{9D74EDE8-F436-A783-75B9-6ECA2CF7CE67}"/>
+              </a:ext>
+            </a:extLst>
+          </p:cNvPr>
+          <p:cNvSpPr txBox="1"/>
+          <p:nvPr/>
+        </p:nvSpPr>
+        <p:spPr>
+          <a:xfrm>
+            <a:off x="981027" y="9700756"/>
+            <a:ext cx="642942" cy="276999"/>
+          </a:xfrm>
+          <a:prstGeom prst="rect">
+            <a:avLst/>
+          </a:prstGeom>
+          <a:noFill/>
+        </p:spPr>
+        <p:txBody>
+          <a:bodyPr wrap="square" rtlCol="0">
+            <a:spAutoFit/>
+          </a:bodyPr>
+          <a:lstStyle/>
+          <a:p>
+            <a:pPr marL="0" marR="0" lvl="0" indent="0" algn="ctr" defTabSz="914400" rtl="0" eaLnBrk="1" fontAlgn="auto" latinLnBrk="0" hangingPunct="1">
+              <a:lnSpc>
+                <a:spcPct val="100000"/>
+              </a:lnSpc>
+              <a:spcBef>
+                <a:spcPts val="0"/>
+              </a:spcBef>
+              <a:spcAft>
+                <a:spcPts val="0"/>
+              </a:spcAft>
+              <a:buClrTx/>
+              <a:buSzTx/>
+              <a:buFontTx/>
+              <a:buNone/>
+              <a:defRPr/>
+            </a:pPr>
+            <a:r>
+              <a:rPr kumimoji="0" lang="zh-CN" altLang="en-US" sz="1200" b="1" i="0" u="none" strike="noStrike" kern="1200" cap="none" spc="0" normalizeH="0" baseline="0" noProof="0" dirty="0">
+                <a:ln>
+                  <a:noFill/>
+                </a:ln>
+                <a:solidFill>
+                  <a:prstClr val="black"/>
+                </a:solidFill>
+                <a:effectLst/>
+                <a:uLnTx/>
+                <a:uFillTx/>
+                <a:latin typeface="微软雅黑" panose="020B0503020204020204" charset="-122"/>
+                <a:ea typeface="微软雅黑" panose="020B0503020204020204" charset="-122"/>
+                <a:cs typeface="+mn-cs"/>
+              </a:rPr>
+              <a:t>信号源</a:t>
+            </a:r>
+          </a:p>
+        </p:txBody>
+      </p:sp>
     </p:spTree>
     <p:custDataLst>
       <p:tags r:id="rId1"/>
